--- a/5_6교시_hooks강의/hooks강의_슬라이드.pptx
+++ b/5_6교시_hooks강의/hooks강의_슬라이드.pptx
@@ -29499,7 +29499,7 @@
               <a:t>파일 쓰기 요청을 검사하라</a:t>
             </a:r>
             <a:r>
-              <a:rPr lang="en-US" altLang="ko-KR" sz="1100" dirty="0">
+              <a:rPr lang="en-US" altLang="ko-KR" sz="1100">
                 <a:solidFill>
                   <a:srgbClr val="F4F0E1"/>
                 </a:solidFill>
@@ -29510,6 +29510,17 @@
               <a:t>. </a:t>
             </a:r>
             <a:r>
+              <a:rPr lang="ko-KR" altLang="en-US" sz="1100">
+                <a:solidFill>
+                  <a:srgbClr val="F4F0E1"/>
+                </a:solidFill>
+                <a:latin typeface="Malgun Gothic" pitchFamily="34" charset="0"/>
+                <a:ea typeface="Malgun Gothic" pitchFamily="34" charset="-122"/>
+                <a:cs typeface="Malgun Gothic" pitchFamily="34" charset="-120"/>
+              </a:rPr>
+              <a:t>그 </a:t>
+            </a:r>
+            <a:r>
               <a:rPr lang="ko-KR" altLang="en-US" sz="1100" dirty="0">
                 <a:solidFill>
                   <a:srgbClr val="F4F0E1"/>
@@ -29518,95 +29529,7 @@
                 <a:ea typeface="Malgun Gothic" pitchFamily="34" charset="-122"/>
                 <a:cs typeface="Malgun Gothic" pitchFamily="34" charset="-120"/>
               </a:rPr>
-              <a:t>파일 경로가 </a:t>
-            </a:r>
-            <a:r>
-              <a:rPr lang="en-US" altLang="ko-KR" sz="1100" dirty="0">
-                <a:solidFill>
-                  <a:srgbClr val="F4F0E1"/>
-                </a:solidFill>
-                <a:latin typeface="Malgun Gothic" pitchFamily="34" charset="0"/>
-                <a:ea typeface="Malgun Gothic" pitchFamily="34" charset="-122"/>
-                <a:cs typeface="Malgun Gothic" pitchFamily="34" charset="-120"/>
-              </a:rPr>
-              <a:t>.</a:t>
-            </a:r>
-            <a:r>
-              <a:rPr lang="en-US" altLang="ko-KR" sz="1100" dirty="0" err="1">
-                <a:solidFill>
-                  <a:srgbClr val="F4F0E1"/>
-                </a:solidFill>
-                <a:latin typeface="Malgun Gothic" pitchFamily="34" charset="0"/>
-                <a:ea typeface="Malgun Gothic" pitchFamily="34" charset="-122"/>
-                <a:cs typeface="Malgun Gothic" pitchFamily="34" charset="-120"/>
-              </a:rPr>
-              <a:t>claude</a:t>
-            </a:r>
-            <a:r>
-              <a:rPr lang="en-US" altLang="ko-KR" sz="1100" dirty="0">
-                <a:solidFill>
-                  <a:srgbClr val="F4F0E1"/>
-                </a:solidFill>
-                <a:latin typeface="Malgun Gothic" pitchFamily="34" charset="0"/>
-                <a:ea typeface="Malgun Gothic" pitchFamily="34" charset="-122"/>
-                <a:cs typeface="Malgun Gothic" pitchFamily="34" charset="-120"/>
-              </a:rPr>
-              <a:t> </a:t>
-            </a:r>
-            <a:r>
-              <a:rPr lang="ko-KR" altLang="en-US" sz="1100" dirty="0">
-                <a:solidFill>
-                  <a:srgbClr val="F4F0E1"/>
-                </a:solidFill>
-                <a:latin typeface="Malgun Gothic" pitchFamily="34" charset="0"/>
-                <a:ea typeface="Malgun Gothic" pitchFamily="34" charset="-122"/>
-                <a:cs typeface="Malgun Gothic" pitchFamily="34" charset="-120"/>
-              </a:rPr>
-              <a:t>폴더 안이거나 </a:t>
-            </a:r>
-            <a:r>
-              <a:rPr lang="en-US" altLang="ko-KR" sz="1100" dirty="0" err="1">
-                <a:solidFill>
-                  <a:srgbClr val="F4F0E1"/>
-                </a:solidFill>
-                <a:latin typeface="Malgun Gothic" pitchFamily="34" charset="0"/>
-                <a:ea typeface="Malgun Gothic" pitchFamily="34" charset="-122"/>
-                <a:cs typeface="Malgun Gothic" pitchFamily="34" charset="-120"/>
-              </a:rPr>
-              <a:t>settings.json</a:t>
-            </a:r>
-            <a:r>
-              <a:rPr lang="ko-KR" altLang="en-US" sz="1100" dirty="0">
-                <a:solidFill>
-                  <a:srgbClr val="F4F0E1"/>
-                </a:solidFill>
-                <a:latin typeface="Malgun Gothic" pitchFamily="34" charset="0"/>
-                <a:ea typeface="Malgun Gothic" pitchFamily="34" charset="-122"/>
-                <a:cs typeface="Malgun Gothic" pitchFamily="34" charset="-120"/>
-              </a:rPr>
-              <a:t>이면 검사 없이 항상 허용하라</a:t>
-            </a:r>
-            <a:r>
-              <a:rPr lang="en-US" altLang="ko-KR" sz="1100" dirty="0">
-                <a:solidFill>
-                  <a:srgbClr val="F4F0E1"/>
-                </a:solidFill>
-                <a:latin typeface="Malgun Gothic" pitchFamily="34" charset="0"/>
-                <a:ea typeface="Malgun Gothic" pitchFamily="34" charset="-122"/>
-                <a:cs typeface="Malgun Gothic" pitchFamily="34" charset="-120"/>
-              </a:rPr>
-              <a:t>. </a:t>
-            </a:r>
-            <a:r>
-              <a:rPr lang="ko-KR" altLang="en-US" sz="1100" dirty="0">
-                <a:solidFill>
-                  <a:srgbClr val="F4F0E1"/>
-                </a:solidFill>
-                <a:latin typeface="Malgun Gothic" pitchFamily="34" charset="0"/>
-                <a:ea typeface="Malgun Gothic" pitchFamily="34" charset="-122"/>
-                <a:cs typeface="Malgun Gothic" pitchFamily="34" charset="-120"/>
-              </a:rPr>
-              <a:t>그 외 파일의 내용에 </a:t>
+              <a:t>외 파일의 내용에 </a:t>
             </a:r>
             <a:r>
               <a:rPr lang="en-US" altLang="ko-KR" sz="1100" dirty="0">

--- a/5_6교시_hooks강의/hooks강의_슬라이드.pptx
+++ b/5_6교시_hooks강의/hooks강의_슬라이드.pptx
@@ -3534,6 +3534,50 @@
                 <a:ea typeface="Malgun Gothic" pitchFamily="34" charset="-122"/>
                 <a:cs typeface="Malgun Gothic" pitchFamily="34" charset="-120"/>
               </a:rPr>
+              <a:t>‘</a:t>
+            </a:r>
+            <a:r>
+              <a:rPr lang="ko-KR" altLang="en-US" sz="1200" dirty="0">
+                <a:solidFill>
+                  <a:srgbClr val="F4F0E1"/>
+                </a:solidFill>
+                <a:latin typeface="Malgun Gothic" pitchFamily="34" charset="0"/>
+                <a:ea typeface="Malgun Gothic" pitchFamily="34" charset="-122"/>
+                <a:cs typeface="Malgun Gothic" pitchFamily="34" charset="-120"/>
+              </a:rPr>
+              <a:t>공개용</a:t>
+            </a:r>
+            <a:r>
+              <a:rPr lang="en-US" altLang="ko-KR" sz="1200" dirty="0">
+                <a:solidFill>
+                  <a:srgbClr val="F4F0E1"/>
+                </a:solidFill>
+                <a:latin typeface="Malgun Gothic" pitchFamily="34" charset="0"/>
+                <a:ea typeface="Malgun Gothic" pitchFamily="34" charset="-122"/>
+                <a:cs typeface="Malgun Gothic" pitchFamily="34" charset="-120"/>
+              </a:rPr>
+              <a:t>’</a:t>
+            </a:r>
+            <a:r>
+              <a:rPr lang="ko-KR" altLang="en-US" sz="1200">
+                <a:solidFill>
+                  <a:srgbClr val="F4F0E1"/>
+                </a:solidFill>
+                <a:latin typeface="Malgun Gothic" pitchFamily="34" charset="0"/>
+                <a:ea typeface="Malgun Gothic" pitchFamily="34" charset="-122"/>
+                <a:cs typeface="Malgun Gothic" pitchFamily="34" charset="-120"/>
+              </a:rPr>
+              <a:t>이라는 단어가 내용으로 들어간 </a:t>
+            </a:r>
+            <a:r>
+              <a:rPr lang="en-US" altLang="ko-KR" sz="1200" dirty="0">
+                <a:solidFill>
+                  <a:srgbClr val="F4F0E1"/>
+                </a:solidFill>
+                <a:latin typeface="Malgun Gothic" pitchFamily="34" charset="0"/>
+                <a:ea typeface="Malgun Gothic" pitchFamily="34" charset="-122"/>
+                <a:cs typeface="Malgun Gothic" pitchFamily="34" charset="-120"/>
+              </a:rPr>
               <a:t>‘8</a:t>
             </a:r>
             <a:r>
@@ -3611,51 +3655,7 @@
                 <a:ea typeface="Malgun Gothic" pitchFamily="34" charset="-122"/>
                 <a:cs typeface="Malgun Gothic" pitchFamily="34" charset="-120"/>
               </a:rPr>
-              <a:t> 파일을 만들고 </a:t>
-            </a:r>
-            <a:r>
-              <a:rPr lang="en-US" altLang="ko-KR" sz="1200" dirty="0">
-                <a:solidFill>
-                  <a:srgbClr val="F4F0E1"/>
-                </a:solidFill>
-                <a:latin typeface="Malgun Gothic" pitchFamily="34" charset="0"/>
-                <a:ea typeface="Malgun Gothic" pitchFamily="34" charset="-122"/>
-                <a:cs typeface="Malgun Gothic" pitchFamily="34" charset="-120"/>
-              </a:rPr>
-              <a:t>‘</a:t>
-            </a:r>
-            <a:r>
-              <a:rPr lang="ko-KR" altLang="en-US" sz="1200" dirty="0">
-                <a:solidFill>
-                  <a:srgbClr val="F4F0E1"/>
-                </a:solidFill>
-                <a:latin typeface="Malgun Gothic" pitchFamily="34" charset="0"/>
-                <a:ea typeface="Malgun Gothic" pitchFamily="34" charset="-122"/>
-                <a:cs typeface="Malgun Gothic" pitchFamily="34" charset="-120"/>
-              </a:rPr>
-              <a:t>공개용</a:t>
-            </a:r>
-            <a:r>
-              <a:rPr lang="en-US" altLang="ko-KR" sz="1200" dirty="0">
-                <a:solidFill>
-                  <a:srgbClr val="F4F0E1"/>
-                </a:solidFill>
-                <a:latin typeface="Malgun Gothic" pitchFamily="34" charset="0"/>
-                <a:ea typeface="Malgun Gothic" pitchFamily="34" charset="-122"/>
-                <a:cs typeface="Malgun Gothic" pitchFamily="34" charset="-120"/>
-              </a:rPr>
-              <a:t>’</a:t>
-            </a:r>
-            <a:r>
-              <a:rPr lang="ko-KR" altLang="en-US" sz="1200" dirty="0">
-                <a:solidFill>
-                  <a:srgbClr val="F4F0E1"/>
-                </a:solidFill>
-                <a:latin typeface="Malgun Gothic" pitchFamily="34" charset="0"/>
-                <a:ea typeface="Malgun Gothic" pitchFamily="34" charset="-122"/>
-                <a:cs typeface="Malgun Gothic" pitchFamily="34" charset="-120"/>
-              </a:rPr>
-              <a:t>이라는 단어를 내용에 추가해</a:t>
+              <a:t> 파일을 만들어</a:t>
             </a:r>
             <a:r>
               <a:rPr lang="en-US" altLang="ko-KR" sz="1200" dirty="0">
@@ -29518,7 +29518,7 @@
                 <a:ea typeface="Malgun Gothic" pitchFamily="34" charset="-122"/>
                 <a:cs typeface="Malgun Gothic" pitchFamily="34" charset="-120"/>
               </a:rPr>
-              <a:t>그 </a:t>
+              <a:t>파일의 </a:t>
             </a:r>
             <a:r>
               <a:rPr lang="ko-KR" altLang="en-US" sz="1100" dirty="0">
@@ -29529,7 +29529,7 @@
                 <a:ea typeface="Malgun Gothic" pitchFamily="34" charset="-122"/>
                 <a:cs typeface="Malgun Gothic" pitchFamily="34" charset="-120"/>
               </a:rPr>
-              <a:t>외 파일의 내용에 </a:t>
+              <a:t>내용에 </a:t>
             </a:r>
             <a:r>
               <a:rPr lang="en-US" altLang="ko-KR" sz="1100" dirty="0">
@@ -30552,6 +30552,17 @@
               </a:lnSpc>
             </a:pPr>
             <a:r>
+              <a:rPr lang="ko-KR" altLang="en-US" sz="1200" dirty="0">
+                <a:solidFill>
+                  <a:srgbClr val="F4F0E1"/>
+                </a:solidFill>
+                <a:latin typeface="Malgun Gothic" pitchFamily="34" charset="0"/>
+                <a:ea typeface="Malgun Gothic" pitchFamily="34" charset="-122"/>
+                <a:cs typeface="Malgun Gothic" pitchFamily="34" charset="-120"/>
+              </a:rPr>
+              <a:t> </a:t>
+            </a:r>
+            <a:r>
               <a:rPr lang="en-US" altLang="ko-KR" sz="1200" dirty="0">
                 <a:solidFill>
                   <a:srgbClr val="F4F0E1"/>
@@ -30560,6 +30571,50 @@
                 <a:ea typeface="Malgun Gothic" pitchFamily="34" charset="-122"/>
                 <a:cs typeface="Malgun Gothic" pitchFamily="34" charset="-120"/>
               </a:rPr>
+              <a:t>‘</a:t>
+            </a:r>
+            <a:r>
+              <a:rPr lang="ko-KR" altLang="en-US" sz="1200" dirty="0">
+                <a:solidFill>
+                  <a:srgbClr val="F4F0E1"/>
+                </a:solidFill>
+                <a:latin typeface="Malgun Gothic" pitchFamily="34" charset="0"/>
+                <a:ea typeface="Malgun Gothic" pitchFamily="34" charset="-122"/>
+                <a:cs typeface="Malgun Gothic" pitchFamily="34" charset="-120"/>
+              </a:rPr>
+              <a:t>대외비</a:t>
+            </a:r>
+            <a:r>
+              <a:rPr lang="en-US" altLang="ko-KR" sz="1200" dirty="0">
+                <a:solidFill>
+                  <a:srgbClr val="F4F0E1"/>
+                </a:solidFill>
+                <a:latin typeface="Malgun Gothic" pitchFamily="34" charset="0"/>
+                <a:ea typeface="Malgun Gothic" pitchFamily="34" charset="-122"/>
+                <a:cs typeface="Malgun Gothic" pitchFamily="34" charset="-120"/>
+              </a:rPr>
+              <a:t>’</a:t>
+            </a:r>
+            <a:r>
+              <a:rPr lang="ko-KR" altLang="en-US" sz="1200">
+                <a:solidFill>
+                  <a:srgbClr val="F4F0E1"/>
+                </a:solidFill>
+                <a:latin typeface="Malgun Gothic" pitchFamily="34" charset="0"/>
+                <a:ea typeface="Malgun Gothic" pitchFamily="34" charset="-122"/>
+                <a:cs typeface="Malgun Gothic" pitchFamily="34" charset="-120"/>
+              </a:rPr>
+              <a:t>라는 단어가 내용으로 들어간 </a:t>
+            </a:r>
+            <a:r>
+              <a:rPr lang="en-US" altLang="ko-KR" sz="1200" dirty="0">
+                <a:solidFill>
+                  <a:srgbClr val="F4F0E1"/>
+                </a:solidFill>
+                <a:latin typeface="Malgun Gothic" pitchFamily="34" charset="0"/>
+                <a:ea typeface="Malgun Gothic" pitchFamily="34" charset="-122"/>
+                <a:cs typeface="Malgun Gothic" pitchFamily="34" charset="-120"/>
+              </a:rPr>
               <a:t>‘8</a:t>
             </a:r>
             <a:r>
@@ -30637,7 +30692,7 @@
                 <a:ea typeface="Malgun Gothic" pitchFamily="34" charset="-122"/>
                 <a:cs typeface="Malgun Gothic" pitchFamily="34" charset="-120"/>
               </a:rPr>
-              <a:t> 파일을 만들고 </a:t>
+              <a:t> 파일을 만들어</a:t>
             </a:r>
             <a:r>
               <a:rPr lang="en-US" altLang="ko-KR" sz="1200" dirty="0">
@@ -30648,51 +30703,7 @@
                 <a:ea typeface="Malgun Gothic" pitchFamily="34" charset="-122"/>
                 <a:cs typeface="Malgun Gothic" pitchFamily="34" charset="-120"/>
               </a:rPr>
-              <a:t>‘</a:t>
-            </a:r>
-            <a:r>
-              <a:rPr lang="ko-KR" altLang="en-US" sz="1200" dirty="0">
-                <a:solidFill>
-                  <a:srgbClr val="F4F0E1"/>
-                </a:solidFill>
-                <a:latin typeface="Malgun Gothic" pitchFamily="34" charset="0"/>
-                <a:ea typeface="Malgun Gothic" pitchFamily="34" charset="-122"/>
-                <a:cs typeface="Malgun Gothic" pitchFamily="34" charset="-120"/>
-              </a:rPr>
-              <a:t>대외비</a:t>
-            </a:r>
-            <a:r>
-              <a:rPr lang="en-US" altLang="ko-KR" sz="1200" dirty="0">
-                <a:solidFill>
-                  <a:srgbClr val="F4F0E1"/>
-                </a:solidFill>
-                <a:latin typeface="Malgun Gothic" pitchFamily="34" charset="0"/>
-                <a:ea typeface="Malgun Gothic" pitchFamily="34" charset="-122"/>
-                <a:cs typeface="Malgun Gothic" pitchFamily="34" charset="-120"/>
-              </a:rPr>
-              <a:t>’</a:t>
-            </a:r>
-            <a:r>
-              <a:rPr lang="ko-KR" altLang="en-US" sz="1200" dirty="0">
-                <a:solidFill>
-                  <a:srgbClr val="F4F0E1"/>
-                </a:solidFill>
-                <a:latin typeface="Malgun Gothic" pitchFamily="34" charset="0"/>
-                <a:ea typeface="Malgun Gothic" pitchFamily="34" charset="-122"/>
-                <a:cs typeface="Malgun Gothic" pitchFamily="34" charset="-120"/>
-              </a:rPr>
-              <a:t>라는 단어를 내용에 추가해</a:t>
-            </a:r>
-            <a:r>
-              <a:rPr lang="en-US" altLang="ko-KR" sz="1200" dirty="0">
-                <a:solidFill>
-                  <a:srgbClr val="F4F0E1"/>
-                </a:solidFill>
-                <a:latin typeface="Malgun Gothic" pitchFamily="34" charset="0"/>
-                <a:ea typeface="Malgun Gothic" pitchFamily="34" charset="-122"/>
-                <a:cs typeface="Malgun Gothic" pitchFamily="34" charset="-120"/>
-              </a:rPr>
-              <a:t>. </a:t>
+              <a:t>.  </a:t>
             </a:r>
             <a:r>
               <a:rPr lang="ko-KR" altLang="en-US" sz="1200" dirty="0">
